--- a/examples/exterior_design_analysis_branded.pptx
+++ b/examples/exterior_design_analysis_branded.pptx
@@ -4164,7 +4164,7 @@
               </a:defRPr>
             </a:pPr>
             <a:r>
-              <a:t>HKM  /  CUSTOMER RESEARCH</a:t>
+              <a:t>AMO  /  CUSTOMER RESEARCH</a:t>
             </a:r>
           </a:p>
         </p:txBody>
@@ -4315,7 +4315,7 @@
       </p:sp>
       <p:pic>
         <p:nvPicPr>
-          <p:cNvPr id="8" name="Picture 7" descr="hkm-logo.png"/>
+          <p:cNvPr id="8" name="Picture 7" descr="amo-logo.png"/>
           <p:cNvPicPr>
             <a:picLocks noChangeAspect="1"/>
           </p:cNvPicPr>
@@ -5661,7 +5661,7 @@
               </a:defRPr>
             </a:pPr>
             <a:r>
-              <a:t>HKM  /  CUSTOMER RESEARCH</a:t>
+              <a:t>AMO  /  CUSTOMER RESEARCH</a:t>
             </a:r>
           </a:p>
         </p:txBody>
@@ -5812,7 +5812,7 @@
       </p:sp>
       <p:pic>
         <p:nvPicPr>
-          <p:cNvPr id="8" name="Picture 7" descr="hkm-logo.png"/>
+          <p:cNvPr id="8" name="Picture 7" descr="amo-logo.png"/>
           <p:cNvPicPr>
             <a:picLocks noChangeAspect="1"/>
           </p:cNvPicPr>
@@ -7273,7 +7273,7 @@
               </a:defRPr>
             </a:pPr>
             <a:r>
-              <a:t>HKM  /  CUSTOMER RESEARCH</a:t>
+              <a:t>AMO  /  CUSTOMER RESEARCH</a:t>
             </a:r>
           </a:p>
         </p:txBody>
@@ -7424,7 +7424,7 @@
       </p:sp>
       <p:pic>
         <p:nvPicPr>
-          <p:cNvPr id="8" name="Picture 7" descr="hkm-logo.png"/>
+          <p:cNvPr id="8" name="Picture 7" descr="amo-logo.png"/>
           <p:cNvPicPr>
             <a:picLocks noChangeAspect="1"/>
           </p:cNvPicPr>
@@ -8519,7 +8519,7 @@
               </a:defRPr>
             </a:pPr>
             <a:r>
-              <a:t>HKM  /  CUSTOMER RESEARCH</a:t>
+              <a:t>AMO  /  CUSTOMER RESEARCH</a:t>
             </a:r>
           </a:p>
         </p:txBody>
@@ -8670,7 +8670,7 @@
       </p:sp>
       <p:pic>
         <p:nvPicPr>
-          <p:cNvPr id="8" name="Picture 7" descr="hkm-logo.png"/>
+          <p:cNvPr id="8" name="Picture 7" descr="amo-logo.png"/>
           <p:cNvPicPr>
             <a:picLocks noChangeAspect="1"/>
           </p:cNvPicPr>
@@ -9521,7 +9521,7 @@
               </a:defRPr>
             </a:pPr>
             <a:r>
-              <a:t>HKM  /  CUSTOMER RESEARCH</a:t>
+              <a:t>AMO  /  CUSTOMER RESEARCH</a:t>
             </a:r>
           </a:p>
         </p:txBody>
@@ -9672,7 +9672,7 @@
       </p:sp>
       <p:pic>
         <p:nvPicPr>
-          <p:cNvPr id="8" name="Picture 7" descr="hkm-logo.png"/>
+          <p:cNvPr id="8" name="Picture 7" descr="amo-logo.png"/>
           <p:cNvPicPr>
             <a:picLocks noChangeAspect="1"/>
           </p:cNvPicPr>
@@ -10006,7 +10006,7 @@
               </a:defRPr>
             </a:pPr>
             <a:r>
-              <a:t>HKM  /  CUSTOMER RESEARCH</a:t>
+              <a:t>AMO  /  CUSTOMER RESEARCH</a:t>
             </a:r>
           </a:p>
         </p:txBody>
@@ -10157,7 +10157,7 @@
       </p:sp>
       <p:pic>
         <p:nvPicPr>
-          <p:cNvPr id="8" name="Picture 7" descr="hkm-logo.png"/>
+          <p:cNvPr id="8" name="Picture 7" descr="amo-logo.png"/>
           <p:cNvPicPr>
             <a:picLocks noChangeAspect="1"/>
           </p:cNvPicPr>
